--- a/media/resources/files/EkiOrunduuOnduktar_Boluu_KondumB_q4MUWSn.pptx
+++ b/media/resources/files/EkiOrunduuOnduktar_Boluu_KondumB_q4MUWSn.pptx
@@ -8181,7 +8181,7 @@
               <a:pPr algn="ctr"/>
               <a:r>
                 <a:rPr lang="en-GB" sz="1200" dirty="0"/>
-                <a:t>2 ÷ 0.5 =  </a:t>
+                <a:t>2 ÷ 0,5 =  </a:t>
               </a:r>
             </a:p>
           </p:txBody>
@@ -8570,7 +8570,7 @@
             <a:pPr algn="ctr"/>
             <a:r>
               <a:rPr lang="en-GB" sz="1200" dirty="0"/>
-              <a:t>3 ÷ 0.5 =  </a:t>
+              <a:t>3 ÷ 0,5 =  </a:t>
             </a:r>
           </a:p>
         </p:txBody>
@@ -8907,7 +8907,7 @@
             <a:pPr algn="ctr"/>
             <a:r>
               <a:rPr lang="en-GB" sz="1200" dirty="0"/>
-              <a:t>5 ÷ 0.5 =  </a:t>
+              <a:t>5 ÷ 0,5 =  </a:t>
             </a:r>
           </a:p>
         </p:txBody>
@@ -9329,7 +9329,7 @@
             <a:pPr algn="ctr"/>
             <a:r>
               <a:rPr lang="en-GB" sz="1200" dirty="0"/>
-              <a:t>2.5 ÷ 0.5 =  </a:t>
+              <a:t>2,5 ÷ 0,5 =  </a:t>
             </a:r>
           </a:p>
         </p:txBody>
@@ -9620,7 +9620,7 @@
             <a:pPr algn="ctr"/>
             <a:r>
               <a:rPr lang="en-GB" sz="1200" dirty="0"/>
-              <a:t>0.5 ÷ 0.5 =  </a:t>
+              <a:t>0,5 ÷ 0,5 =  </a:t>
             </a:r>
           </a:p>
         </p:txBody>
@@ -9826,7 +9826,7 @@
                 <a:ea typeface="+mn-ea"/>
                 <a:cs typeface="+mn-cs"/>
               </a:rPr>
-              <a:t>7 ÷ 0.5 =  </a:t>
+              <a:t>7 ÷ 0,5 =  </a:t>
             </a:r>
           </a:p>
         </p:txBody>
@@ -9911,7 +9911,7 @@
                 <a:ea typeface="+mn-ea"/>
                 <a:cs typeface="+mn-cs"/>
               </a:rPr>
-              <a:t>20 ÷ 0.5 =  </a:t>
+              <a:t>20 ÷ 0,5 =  </a:t>
             </a:r>
           </a:p>
         </p:txBody>
@@ -9995,7 +9995,7 @@
             <a:pPr algn="ctr"/>
             <a:r>
               <a:rPr lang="en-GB" sz="1200" dirty="0"/>
-              <a:t>3 ÷ 0.2 =  </a:t>
+              <a:t>3 ÷ 0,2 =  </a:t>
             </a:r>
           </a:p>
         </p:txBody>
@@ -10286,7 +10286,7 @@
             <a:pPr algn="ctr"/>
             <a:r>
               <a:rPr lang="en-GB" sz="1200" dirty="0"/>
-              <a:t>4 ÷ 0.2 =  </a:t>
+              <a:t>4 ÷ 0,2 =  </a:t>
             </a:r>
           </a:p>
         </p:txBody>
@@ -10644,7 +10644,7 @@
             <a:pPr algn="ctr"/>
             <a:r>
               <a:rPr lang="en-GB" sz="1200" dirty="0"/>
-              <a:t>2 ÷ 0.1 =  </a:t>
+              <a:t>2 ÷ 0,1 =  </a:t>
             </a:r>
           </a:p>
         </p:txBody>
@@ -10798,7 +10798,7 @@
             <a:pPr algn="ctr"/>
             <a:r>
               <a:rPr lang="en-GB" sz="1200" dirty="0"/>
-              <a:t>5 ÷ 0.1 =  </a:t>
+              <a:t>5 ÷ 0,1 =  </a:t>
             </a:r>
           </a:p>
         </p:txBody>
@@ -11384,7 +11384,7 @@
                 <a:ea typeface="+mn-ea"/>
                 <a:cs typeface="+mn-cs"/>
               </a:rPr>
-              <a:t>9 ÷ 0.5 =  </a:t>
+              <a:t>9 ÷ 0,5 =  </a:t>
             </a:r>
           </a:p>
         </p:txBody>
@@ -11698,7 +11698,7 @@
                 <a:ea typeface="+mn-ea"/>
                 <a:cs typeface="+mn-cs"/>
               </a:rPr>
-              <a:t>6 ÷ 0.2 =  </a:t>
+              <a:t>6 ÷ 0,2 =  </a:t>
             </a:r>
           </a:p>
         </p:txBody>
@@ -11783,7 +11783,7 @@
                 <a:ea typeface="+mn-ea"/>
                 <a:cs typeface="+mn-cs"/>
               </a:rPr>
-              <a:t>2 ÷ 0.25 =  </a:t>
+              <a:t>2 ÷ 0,25 =  </a:t>
             </a:r>
           </a:p>
         </p:txBody>
@@ -11868,7 +11868,7 @@
                 <a:ea typeface="+mn-ea"/>
                 <a:cs typeface="+mn-cs"/>
               </a:rPr>
-              <a:t>14 ÷ 0.1 =  </a:t>
+              <a:t>14 ÷ 0,1 =  </a:t>
             </a:r>
           </a:p>
         </p:txBody>
@@ -11953,7 +11953,7 @@
                 <a:ea typeface="+mn-ea"/>
                 <a:cs typeface="+mn-cs"/>
               </a:rPr>
-              <a:t>5 ÷ 0.02 =  </a:t>
+              <a:t>5 ÷ 0,02 =  </a:t>
             </a:r>
           </a:p>
         </p:txBody>
@@ -12090,7 +12090,7 @@
               <a:pPr algn="ctr"/>
               <a:r>
                 <a:rPr lang="en-GB" sz="1200" dirty="0"/>
-                <a:t>2 ÷ 0.5 =  </a:t>
+                <a:t>2 ÷ 0,5 =  </a:t>
               </a:r>
             </a:p>
           </p:txBody>
@@ -12479,7 +12479,7 @@
             <a:pPr algn="ctr"/>
             <a:r>
               <a:rPr lang="en-GB" sz="1200" dirty="0"/>
-              <a:t>3 ÷ 0.5 =  </a:t>
+              <a:t>3 ÷ 0,5 =  </a:t>
             </a:r>
           </a:p>
         </p:txBody>
@@ -12859,7 +12859,7 @@
             <a:pPr algn="ctr"/>
             <a:r>
               <a:rPr lang="en-GB" sz="1200" dirty="0"/>
-              <a:t>5 ÷ 0.5 =  </a:t>
+              <a:t>5 ÷ 0,5 =  </a:t>
             </a:r>
           </a:p>
         </p:txBody>
@@ -13324,7 +13324,7 @@
             <a:pPr algn="ctr"/>
             <a:r>
               <a:rPr lang="en-GB" sz="1200" dirty="0"/>
-              <a:t>2.5 ÷ 0.5 =  </a:t>
+              <a:t>2,5 ÷ 0,5 =  </a:t>
             </a:r>
           </a:p>
         </p:txBody>
@@ -13658,7 +13658,7 @@
             <a:pPr algn="ctr"/>
             <a:r>
               <a:rPr lang="en-GB" sz="1200" dirty="0"/>
-              <a:t>0.5 ÷ 0.5 =  </a:t>
+              <a:t>0,5 ÷ 0,5 =  </a:t>
             </a:r>
           </a:p>
         </p:txBody>
@@ -13907,7 +13907,7 @@
                 <a:ea typeface="+mn-ea"/>
                 <a:cs typeface="+mn-cs"/>
               </a:rPr>
-              <a:t>7 ÷ 0.5 =  </a:t>
+              <a:t>7 ÷ 0,5 =  </a:t>
             </a:r>
           </a:p>
         </p:txBody>
@@ -13992,7 +13992,7 @@
                 <a:ea typeface="+mn-ea"/>
                 <a:cs typeface="+mn-cs"/>
               </a:rPr>
-              <a:t>20 ÷ 0.5 =  </a:t>
+              <a:t>20 ÷ 0,5 =  </a:t>
             </a:r>
           </a:p>
         </p:txBody>
@@ -14162,7 +14162,7 @@
             <a:pPr algn="ctr"/>
             <a:r>
               <a:rPr lang="en-GB" sz="1200" dirty="0"/>
-              <a:t>3 ÷ 0.2 =  </a:t>
+              <a:t>3 ÷ 0,2 =  </a:t>
             </a:r>
           </a:p>
         </p:txBody>
@@ -14453,7 +14453,7 @@
             <a:pPr algn="ctr"/>
             <a:r>
               <a:rPr lang="en-GB" sz="1200" dirty="0"/>
-              <a:t>4 ÷ 0.2 =  </a:t>
+              <a:t>4 ÷ 0,2 =  </a:t>
             </a:r>
           </a:p>
         </p:txBody>
@@ -14811,7 +14811,7 @@
             <a:pPr algn="ctr"/>
             <a:r>
               <a:rPr lang="en-GB" sz="1200" dirty="0"/>
-              <a:t>2 ÷ 0.1 =  </a:t>
+              <a:t>2 ÷ 0,1 =  </a:t>
             </a:r>
           </a:p>
         </p:txBody>
@@ -14965,7 +14965,7 @@
             <a:pPr algn="ctr"/>
             <a:r>
               <a:rPr lang="en-GB" sz="1200" dirty="0"/>
-              <a:t>5 ÷ 0.1 =  </a:t>
+              <a:t>5 ÷ 0,1 =  </a:t>
             </a:r>
           </a:p>
         </p:txBody>
@@ -15551,7 +15551,7 @@
                 <a:ea typeface="+mn-ea"/>
                 <a:cs typeface="+mn-cs"/>
               </a:rPr>
-              <a:t>9 ÷ 0.5 =  </a:t>
+              <a:t>9 ÷ 0,5 =  </a:t>
             </a:r>
           </a:p>
         </p:txBody>
@@ -15865,7 +15865,7 @@
                 <a:ea typeface="+mn-ea"/>
                 <a:cs typeface="+mn-cs"/>
               </a:rPr>
-              <a:t>6 ÷ 0.2 =  </a:t>
+              <a:t>6 ÷ 0,2 =  </a:t>
             </a:r>
           </a:p>
         </p:txBody>
@@ -15950,7 +15950,7 @@
                 <a:ea typeface="+mn-ea"/>
                 <a:cs typeface="+mn-cs"/>
               </a:rPr>
-              <a:t>2 ÷ 0.25 =  </a:t>
+              <a:t>2 ÷ 0,25 =  </a:t>
             </a:r>
           </a:p>
         </p:txBody>
@@ -16035,7 +16035,7 @@
                 <a:ea typeface="+mn-ea"/>
                 <a:cs typeface="+mn-cs"/>
               </a:rPr>
-              <a:t>14 ÷ 0.1 =  </a:t>
+              <a:t>14 ÷ 0,1 =  </a:t>
             </a:r>
           </a:p>
         </p:txBody>
@@ -16120,7 +16120,7 @@
                 <a:ea typeface="+mn-ea"/>
                 <a:cs typeface="+mn-cs"/>
               </a:rPr>
-              <a:t>5 ÷ 0.02 =  </a:t>
+              <a:t>5 ÷ 0,02 =  </a:t>
             </a:r>
           </a:p>
         </p:txBody>
@@ -16300,7 +16300,7 @@
               <a:pPr algn="ctr"/>
               <a:r>
                 <a:rPr lang="en-GB" sz="1200" dirty="0"/>
-                <a:t>2 ÷ 0.5 =  </a:t>
+                <a:t>2 ÷ 0,5 =  </a:t>
               </a:r>
             </a:p>
           </p:txBody>
@@ -16689,7 +16689,7 @@
             <a:pPr algn="ctr"/>
             <a:r>
               <a:rPr lang="en-GB" sz="1200" dirty="0"/>
-              <a:t>3 ÷ 0.5 =  </a:t>
+              <a:t>3 ÷ 0,5 =  </a:t>
             </a:r>
           </a:p>
         </p:txBody>
@@ -17163,7 +17163,7 @@
             <a:pPr algn="ctr"/>
             <a:r>
               <a:rPr lang="en-GB" sz="1200" dirty="0"/>
-              <a:t>5 ÷ 0.5 =  </a:t>
+              <a:t>5 ÷ 0,5 =  </a:t>
             </a:r>
           </a:p>
         </p:txBody>
@@ -17863,7 +17863,7 @@
             <a:pPr algn="ctr"/>
             <a:r>
               <a:rPr lang="en-GB" sz="1200" dirty="0"/>
-              <a:t>2.5 ÷ 0.5 =  </a:t>
+              <a:t>2,5 ÷ 0,5 =  </a:t>
             </a:r>
           </a:p>
         </p:txBody>
@@ -18291,7 +18291,7 @@
             <a:pPr algn="ctr"/>
             <a:r>
               <a:rPr lang="en-GB" sz="1200" dirty="0"/>
-              <a:t>0.5 ÷ 0.5 =  </a:t>
+              <a:t>0,5 ÷ 0,5 =  </a:t>
             </a:r>
           </a:p>
         </p:txBody>
@@ -18540,7 +18540,7 @@
                 <a:ea typeface="+mn-ea"/>
                 <a:cs typeface="+mn-cs"/>
               </a:rPr>
-              <a:t>7 ÷ 0.5 =  </a:t>
+              <a:t>7 ÷ 0,5 =  </a:t>
             </a:r>
           </a:p>
         </p:txBody>
@@ -18625,7 +18625,7 @@
                 <a:ea typeface="+mn-ea"/>
                 <a:cs typeface="+mn-cs"/>
               </a:rPr>
-              <a:t>20 ÷ 0.5 =  </a:t>
+              <a:t>20 ÷ 0,5 =  </a:t>
             </a:r>
           </a:p>
         </p:txBody>
@@ -18795,7 +18795,7 @@
             <a:pPr algn="ctr"/>
             <a:r>
               <a:rPr lang="en-GB" sz="1200" dirty="0"/>
-              <a:t>3 ÷ 0.2 =  </a:t>
+              <a:t>3 ÷ 0,2 =  </a:t>
             </a:r>
           </a:p>
         </p:txBody>
@@ -19807,7 +19807,7 @@
             <a:pPr algn="ctr"/>
             <a:r>
               <a:rPr lang="en-GB" sz="1200" dirty="0"/>
-              <a:t>4 ÷ 0.2 =  </a:t>
+              <a:t>4 ÷ 0,2 =  </a:t>
             </a:r>
           </a:p>
         </p:txBody>
@@ -21112,7 +21112,7 @@
             <a:pPr algn="ctr"/>
             <a:r>
               <a:rPr lang="en-GB" sz="1200" dirty="0"/>
-              <a:t>2 ÷ 0.1 =  </a:t>
+              <a:t>2 ÷ 0,1 =  </a:t>
             </a:r>
           </a:p>
         </p:txBody>
@@ -21536,7 +21536,7 @@
             <a:pPr algn="ctr"/>
             <a:r>
               <a:rPr lang="en-GB" sz="1200" dirty="0"/>
-              <a:t>5 ÷ 0.1 =  </a:t>
+              <a:t>5 ÷ 0,1 =  </a:t>
             </a:r>
           </a:p>
         </p:txBody>
@@ -23527,7 +23527,7 @@
                 <a:ea typeface="+mn-ea"/>
                 <a:cs typeface="+mn-cs"/>
               </a:rPr>
-              <a:t>9 ÷ 0.5 =  </a:t>
+              <a:t>9 ÷ 0,5 =  </a:t>
             </a:r>
           </a:p>
         </p:txBody>
@@ -23927,7 +23927,7 @@
                 <a:ea typeface="+mn-ea"/>
                 <a:cs typeface="+mn-cs"/>
               </a:rPr>
-              <a:t>6 ÷ 0.2 =  </a:t>
+              <a:t>6 ÷ 0,2 =  </a:t>
             </a:r>
           </a:p>
         </p:txBody>
@@ -24055,7 +24055,7 @@
                 <a:ea typeface="+mn-ea"/>
                 <a:cs typeface="+mn-cs"/>
               </a:rPr>
-              <a:t>2 ÷ 0.25 =  </a:t>
+              <a:t>2 ÷ 0,25 =  </a:t>
             </a:r>
           </a:p>
         </p:txBody>
@@ -24183,7 +24183,7 @@
                 <a:ea typeface="+mn-ea"/>
                 <a:cs typeface="+mn-cs"/>
               </a:rPr>
-              <a:t>14 ÷ 0.1 =  </a:t>
+              <a:t>14 ÷ 0,1 =  </a:t>
             </a:r>
           </a:p>
         </p:txBody>
@@ -24311,7 +24311,7 @@
                 <a:ea typeface="+mn-ea"/>
                 <a:cs typeface="+mn-cs"/>
               </a:rPr>
-              <a:t>5 ÷ 0.02 =  </a:t>
+              <a:t>5 ÷ 0,02 =  </a:t>
             </a:r>
           </a:p>
         </p:txBody>
@@ -24534,7 +24534,7 @@
               <a:pPr algn="ctr"/>
               <a:r>
                 <a:rPr lang="en-GB" sz="1200" dirty="0"/>
-                <a:t>2 ÷ 0.5 =  </a:t>
+                <a:t>2 ÷ 0,5 =  </a:t>
               </a:r>
             </a:p>
           </p:txBody>
@@ -24923,7 +24923,7 @@
             <a:pPr algn="ctr"/>
             <a:r>
               <a:rPr lang="en-GB" sz="1200" dirty="0"/>
-              <a:t>3 ÷ 0.5 =  </a:t>
+              <a:t>3 ÷ 0,5 =  </a:t>
             </a:r>
           </a:p>
         </p:txBody>
@@ -25260,7 +25260,7 @@
             <a:pPr algn="ctr"/>
             <a:r>
               <a:rPr lang="en-GB" sz="1200" dirty="0"/>
-              <a:t>5 ÷ 0.5 =  </a:t>
+              <a:t>5 ÷ 0,5 =  </a:t>
             </a:r>
           </a:p>
         </p:txBody>
@@ -25682,7 +25682,7 @@
             <a:pPr algn="ctr"/>
             <a:r>
               <a:rPr lang="en-GB" sz="1200" dirty="0"/>
-              <a:t>2.5 ÷ 0.5 =  </a:t>
+              <a:t>2,5 ÷ 0,5 =  </a:t>
             </a:r>
           </a:p>
         </p:txBody>
@@ -25973,7 +25973,7 @@
             <a:pPr algn="ctr"/>
             <a:r>
               <a:rPr lang="en-GB" sz="1200" dirty="0"/>
-              <a:t>0.5 ÷ 0.5 =  </a:t>
+              <a:t>0,5 ÷ 0,5 =  </a:t>
             </a:r>
           </a:p>
         </p:txBody>
@@ -26179,7 +26179,7 @@
                 <a:ea typeface="+mn-ea"/>
                 <a:cs typeface="+mn-cs"/>
               </a:rPr>
-              <a:t>7 ÷ 0.5 =  </a:t>
+              <a:t>7 ÷ 0,5 =  </a:t>
             </a:r>
           </a:p>
         </p:txBody>
@@ -26264,7 +26264,7 @@
                 <a:ea typeface="+mn-ea"/>
                 <a:cs typeface="+mn-cs"/>
               </a:rPr>
-              <a:t>20 ÷ 0.5 =  </a:t>
+              <a:t>20 ÷ 0,5 =  </a:t>
             </a:r>
           </a:p>
         </p:txBody>
@@ -26348,7 +26348,7 @@
             <a:pPr algn="ctr"/>
             <a:r>
               <a:rPr lang="en-GB" sz="1200" dirty="0"/>
-              <a:t>3 ÷ 0.2 =  </a:t>
+              <a:t>3 ÷ 0,2 =  </a:t>
             </a:r>
           </a:p>
         </p:txBody>
@@ -26639,7 +26639,7 @@
             <a:pPr algn="ctr"/>
             <a:r>
               <a:rPr lang="en-GB" sz="1200" dirty="0"/>
-              <a:t>4 ÷ 0.2 =  </a:t>
+              <a:t>4 ÷ 0,2 =  </a:t>
             </a:r>
           </a:p>
         </p:txBody>
@@ -26997,7 +26997,7 @@
             <a:pPr algn="ctr"/>
             <a:r>
               <a:rPr lang="en-GB" sz="1200" dirty="0"/>
-              <a:t>2 ÷ 0.1 =  </a:t>
+              <a:t>2 ÷ 0,1 =  </a:t>
             </a:r>
           </a:p>
         </p:txBody>
@@ -27151,7 +27151,7 @@
             <a:pPr algn="ctr"/>
             <a:r>
               <a:rPr lang="en-GB" sz="1200" dirty="0"/>
-              <a:t>5 ÷ 0.1 =  </a:t>
+              <a:t>5 ÷ 0,1 =  </a:t>
             </a:r>
           </a:p>
         </p:txBody>
@@ -27737,7 +27737,7 @@
                 <a:ea typeface="+mn-ea"/>
                 <a:cs typeface="+mn-cs"/>
               </a:rPr>
-              <a:t>9 ÷ 0.5 =  </a:t>
+              <a:t>9 ÷ 0,5 =  </a:t>
             </a:r>
           </a:p>
         </p:txBody>
@@ -28051,7 +28051,7 @@
                 <a:ea typeface="+mn-ea"/>
                 <a:cs typeface="+mn-cs"/>
               </a:rPr>
-              <a:t>6 ÷ 0.2 =  </a:t>
+              <a:t>6 ÷ 0,2 =  </a:t>
             </a:r>
           </a:p>
         </p:txBody>
@@ -28136,7 +28136,7 @@
                 <a:ea typeface="+mn-ea"/>
                 <a:cs typeface="+mn-cs"/>
               </a:rPr>
-              <a:t>2 ÷ 0.25 =  </a:t>
+              <a:t>2 ÷ 0,25 =  </a:t>
             </a:r>
           </a:p>
         </p:txBody>
@@ -28221,7 +28221,7 @@
                 <a:ea typeface="+mn-ea"/>
                 <a:cs typeface="+mn-cs"/>
               </a:rPr>
-              <a:t>14 ÷ 0.1 =  </a:t>
+              <a:t>14 ÷ 0,1 =  </a:t>
             </a:r>
           </a:p>
         </p:txBody>
@@ -28306,7 +28306,7 @@
                 <a:ea typeface="+mn-ea"/>
                 <a:cs typeface="+mn-cs"/>
               </a:rPr>
-              <a:t>5 ÷ 0.02 =  </a:t>
+              <a:t>5 ÷ 0,02 =  </a:t>
             </a:r>
           </a:p>
         </p:txBody>
@@ -28413,7 +28413,7 @@
               <a:pPr algn="ctr"/>
               <a:r>
                 <a:rPr lang="en-GB" sz="1200" dirty="0"/>
-                <a:t>2 ÷ 0.5 =  </a:t>
+                <a:t>2 ÷ 0,5 =  </a:t>
               </a:r>
             </a:p>
           </p:txBody>
@@ -28802,7 +28802,7 @@
             <a:pPr algn="ctr"/>
             <a:r>
               <a:rPr lang="en-GB" sz="1200" dirty="0"/>
-              <a:t>3 ÷ 0.5 =  </a:t>
+              <a:t>3 ÷ 0,5 =  </a:t>
             </a:r>
           </a:p>
         </p:txBody>
@@ -29139,7 +29139,7 @@
             <a:pPr algn="ctr"/>
             <a:r>
               <a:rPr lang="en-GB" sz="1200" dirty="0"/>
-              <a:t>5 ÷ 0.5 =  </a:t>
+              <a:t>5 ÷ 0,5 =  </a:t>
             </a:r>
           </a:p>
         </p:txBody>
@@ -29561,7 +29561,7 @@
             <a:pPr algn="ctr"/>
             <a:r>
               <a:rPr lang="en-GB" sz="1200" dirty="0"/>
-              <a:t>2.5 ÷ 0.5 =  </a:t>
+              <a:t>2,5 ÷ 0,5 =  </a:t>
             </a:r>
           </a:p>
         </p:txBody>
@@ -29852,7 +29852,7 @@
             <a:pPr algn="ctr"/>
             <a:r>
               <a:rPr lang="en-GB" sz="1200" dirty="0"/>
-              <a:t>0.5 ÷ 0.5 =  </a:t>
+              <a:t>0,5 ÷ 0,5 =  </a:t>
             </a:r>
           </a:p>
         </p:txBody>
@@ -30058,7 +30058,7 @@
                 <a:ea typeface="+mn-ea"/>
                 <a:cs typeface="+mn-cs"/>
               </a:rPr>
-              <a:t>7 ÷ 0.5 =  </a:t>
+              <a:t>7 ÷ 0,5 =  </a:t>
             </a:r>
           </a:p>
         </p:txBody>
@@ -30143,7 +30143,7 @@
                 <a:ea typeface="+mn-ea"/>
                 <a:cs typeface="+mn-cs"/>
               </a:rPr>
-              <a:t>20 ÷ 0.5 =  </a:t>
+              <a:t>20 ÷ 0,5 =  </a:t>
             </a:r>
           </a:p>
         </p:txBody>
@@ -30227,7 +30227,7 @@
             <a:pPr algn="ctr"/>
             <a:r>
               <a:rPr lang="en-GB" sz="1200" dirty="0"/>
-              <a:t>3 ÷ 0.2 =  </a:t>
+              <a:t>3 ÷ 0,2 =  </a:t>
             </a:r>
           </a:p>
         </p:txBody>
@@ -30518,7 +30518,7 @@
             <a:pPr algn="ctr"/>
             <a:r>
               <a:rPr lang="en-GB" sz="1200" dirty="0"/>
-              <a:t>4 ÷ 0.2 =  </a:t>
+              <a:t>4 ÷ 0,2 =  </a:t>
             </a:r>
           </a:p>
         </p:txBody>
@@ -30876,7 +30876,7 @@
             <a:pPr algn="ctr"/>
             <a:r>
               <a:rPr lang="en-GB" sz="1200" dirty="0"/>
-              <a:t>2 ÷ 0.1 =  </a:t>
+              <a:t>2 ÷ 0,1 =  </a:t>
             </a:r>
           </a:p>
         </p:txBody>
@@ -31030,7 +31030,7 @@
             <a:pPr algn="ctr"/>
             <a:r>
               <a:rPr lang="en-GB" sz="1200" dirty="0"/>
-              <a:t>5 ÷ 0.1 =  </a:t>
+              <a:t>5 ÷ 0,1 =  </a:t>
             </a:r>
           </a:p>
         </p:txBody>
@@ -31616,7 +31616,7 @@
                 <a:ea typeface="+mn-ea"/>
                 <a:cs typeface="+mn-cs"/>
               </a:rPr>
-              <a:t>9 ÷ 0.5 =  </a:t>
+              <a:t>9 ÷ 0,5 =  </a:t>
             </a:r>
           </a:p>
         </p:txBody>
@@ -31930,7 +31930,7 @@
                 <a:ea typeface="+mn-ea"/>
                 <a:cs typeface="+mn-cs"/>
               </a:rPr>
-              <a:t>6 ÷ 0.2 =  </a:t>
+              <a:t>6 ÷ 0,2 =  </a:t>
             </a:r>
           </a:p>
         </p:txBody>
@@ -32015,7 +32015,7 @@
                 <a:ea typeface="+mn-ea"/>
                 <a:cs typeface="+mn-cs"/>
               </a:rPr>
-              <a:t>2 ÷ 0.25 =  </a:t>
+              <a:t>2 ÷ 0,25 =  </a:t>
             </a:r>
           </a:p>
         </p:txBody>
@@ -32100,7 +32100,7 @@
                 <a:ea typeface="+mn-ea"/>
                 <a:cs typeface="+mn-cs"/>
               </a:rPr>
-              <a:t>14 ÷ 0.1 =  </a:t>
+              <a:t>14 ÷ 0,1 =  </a:t>
             </a:r>
           </a:p>
         </p:txBody>
@@ -32185,7 +32185,7 @@
                 <a:ea typeface="+mn-ea"/>
                 <a:cs typeface="+mn-cs"/>
               </a:rPr>
-              <a:t>5 ÷ 0.02 =  </a:t>
+              <a:t>5 ÷ 0,02 =  </a:t>
             </a:r>
           </a:p>
         </p:txBody>
